--- a/hmi/dev/ui/landscape/NSPanel - EU.pptx
+++ b/hmi/dev/ui/landscape/NSPanel - EU.pptx
@@ -12,6 +12,7 @@
     <p:sldId id="259" r:id="rId6"/>
     <p:sldId id="256" r:id="rId7"/>
     <p:sldId id="257" r:id="rId8"/>
+    <p:sldId id="264" r:id="rId9"/>
   </p:sldIdLst>
   <p:sldSz cx="4572000" cy="3048000"/>
   <p:notesSz cx="6858000" cy="9144000"/>
@@ -442,7 +443,7 @@
           <a:p>
             <a:fld id="{024B8AE9-66EA-4D6A-A8A7-9C9BEADD6B50}" type="datetimeFigureOut">
               <a:rPr lang="en-SE" smtClean="0"/>
-              <a:t>2026-04-05</a:t>
+              <a:t>2026-04-12</a:t>
             </a:fld>
             <a:endParaRPr lang="en-SE"/>
           </a:p>
@@ -612,7 +613,7 @@
           <a:p>
             <a:fld id="{024B8AE9-66EA-4D6A-A8A7-9C9BEADD6B50}" type="datetimeFigureOut">
               <a:rPr lang="en-SE" smtClean="0"/>
-              <a:t>2026-04-05</a:t>
+              <a:t>2026-04-12</a:t>
             </a:fld>
             <a:endParaRPr lang="en-SE"/>
           </a:p>
@@ -792,7 +793,7 @@
           <a:p>
             <a:fld id="{024B8AE9-66EA-4D6A-A8A7-9C9BEADD6B50}" type="datetimeFigureOut">
               <a:rPr lang="en-SE" smtClean="0"/>
-              <a:t>2026-04-05</a:t>
+              <a:t>2026-04-12</a:t>
             </a:fld>
             <a:endParaRPr lang="en-SE"/>
           </a:p>
@@ -962,7 +963,7 @@
           <a:p>
             <a:fld id="{024B8AE9-66EA-4D6A-A8A7-9C9BEADD6B50}" type="datetimeFigureOut">
               <a:rPr lang="en-SE" smtClean="0"/>
-              <a:t>2026-04-05</a:t>
+              <a:t>2026-04-12</a:t>
             </a:fld>
             <a:endParaRPr lang="en-SE"/>
           </a:p>
@@ -1206,7 +1207,7 @@
           <a:p>
             <a:fld id="{024B8AE9-66EA-4D6A-A8A7-9C9BEADD6B50}" type="datetimeFigureOut">
               <a:rPr lang="en-SE" smtClean="0"/>
-              <a:t>2026-04-05</a:t>
+              <a:t>2026-04-12</a:t>
             </a:fld>
             <a:endParaRPr lang="en-SE"/>
           </a:p>
@@ -1438,7 +1439,7 @@
           <a:p>
             <a:fld id="{024B8AE9-66EA-4D6A-A8A7-9C9BEADD6B50}" type="datetimeFigureOut">
               <a:rPr lang="en-SE" smtClean="0"/>
-              <a:t>2026-04-05</a:t>
+              <a:t>2026-04-12</a:t>
             </a:fld>
             <a:endParaRPr lang="en-SE"/>
           </a:p>
@@ -1805,7 +1806,7 @@
           <a:p>
             <a:fld id="{024B8AE9-66EA-4D6A-A8A7-9C9BEADD6B50}" type="datetimeFigureOut">
               <a:rPr lang="en-SE" smtClean="0"/>
-              <a:t>2026-04-05</a:t>
+              <a:t>2026-04-12</a:t>
             </a:fld>
             <a:endParaRPr lang="en-SE"/>
           </a:p>
@@ -1923,7 +1924,7 @@
           <a:p>
             <a:fld id="{024B8AE9-66EA-4D6A-A8A7-9C9BEADD6B50}" type="datetimeFigureOut">
               <a:rPr lang="en-SE" smtClean="0"/>
-              <a:t>2026-04-05</a:t>
+              <a:t>2026-04-12</a:t>
             </a:fld>
             <a:endParaRPr lang="en-SE"/>
           </a:p>
@@ -2018,7 +2019,7 @@
           <a:p>
             <a:fld id="{024B8AE9-66EA-4D6A-A8A7-9C9BEADD6B50}" type="datetimeFigureOut">
               <a:rPr lang="en-SE" smtClean="0"/>
-              <a:t>2026-04-05</a:t>
+              <a:t>2026-04-12</a:t>
             </a:fld>
             <a:endParaRPr lang="en-SE"/>
           </a:p>
@@ -2295,7 +2296,7 @@
           <a:p>
             <a:fld id="{024B8AE9-66EA-4D6A-A8A7-9C9BEADD6B50}" type="datetimeFigureOut">
               <a:rPr lang="en-SE" smtClean="0"/>
-              <a:t>2026-04-05</a:t>
+              <a:t>2026-04-12</a:t>
             </a:fld>
             <a:endParaRPr lang="en-SE"/>
           </a:p>
@@ -2552,7 +2553,7 @@
           <a:p>
             <a:fld id="{024B8AE9-66EA-4D6A-A8A7-9C9BEADD6B50}" type="datetimeFigureOut">
               <a:rPr lang="en-SE" smtClean="0"/>
-              <a:t>2026-04-05</a:t>
+              <a:t>2026-04-12</a:t>
             </a:fld>
             <a:endParaRPr lang="en-SE"/>
           </a:p>
@@ -2765,7 +2766,7 @@
           <a:p>
             <a:fld id="{024B8AE9-66EA-4D6A-A8A7-9C9BEADD6B50}" type="datetimeFigureOut">
               <a:rPr lang="en-SE" smtClean="0"/>
-              <a:t>2026-04-05</a:t>
+              <a:t>2026-04-12</a:t>
             </a:fld>
             <a:endParaRPr lang="en-SE"/>
           </a:p>
@@ -5426,6 +5427,352 @@
 </p:sld>
 </file>
 
+<file path=ppt/slides/slide8.xml><?xml version="1.0" encoding="utf-8"?>
+<p:sld xmlns:a="http://schemas.openxmlformats.org/drawingml/2006/main" xmlns:r="http://schemas.openxmlformats.org/officeDocument/2006/relationships" xmlns:p="http://schemas.openxmlformats.org/presentationml/2006/main">
+  <p:cSld>
+    <p:spTree>
+      <p:nvGrpSpPr>
+        <p:cNvPr id="1" name="">
+          <a:extLst>
+            <a:ext uri="{FF2B5EF4-FFF2-40B4-BE49-F238E27FC236}">
+              <a16:creationId xmlns:a16="http://schemas.microsoft.com/office/drawing/2014/main" id="{5103E61A-C2F0-7702-F848-33F98D8C5A57}"/>
+            </a:ext>
+          </a:extLst>
+        </p:cNvPr>
+        <p:cNvGrpSpPr/>
+        <p:nvPr/>
+      </p:nvGrpSpPr>
+      <p:grpSpPr>
+        <a:xfrm>
+          <a:off x="0" y="0"/>
+          <a:ext cx="0" cy="0"/>
+          <a:chOff x="0" y="0"/>
+          <a:chExt cx="0" cy="0"/>
+        </a:xfrm>
+      </p:grpSpPr>
+      <p:pic>
+        <p:nvPicPr>
+          <p:cNvPr id="2" name="Picture 1" descr="A colorful smoke on a black background&#10;&#10;Description automatically generated">
+            <a:extLst>
+              <a:ext uri="{FF2B5EF4-FFF2-40B4-BE49-F238E27FC236}">
+                <a16:creationId xmlns:a16="http://schemas.microsoft.com/office/drawing/2014/main" id="{0C2AE787-8F1E-A5C1-62D2-32319F6D65B8}"/>
+              </a:ext>
+            </a:extLst>
+          </p:cNvPr>
+          <p:cNvPicPr>
+            <a:picLocks noChangeAspect="1"/>
+          </p:cNvPicPr>
+          <p:nvPr/>
+        </p:nvPicPr>
+        <p:blipFill>
+          <a:blip r:embed="rId2">
+            <a:extLst>
+              <a:ext uri="{28A0092B-C50C-407E-A947-70E740481C1C}">
+                <a14:useLocalDpi xmlns:a14="http://schemas.microsoft.com/office/drawing/2010/main" val="0"/>
+              </a:ext>
+            </a:extLst>
+          </a:blip>
+          <a:stretch>
+            <a:fillRect/>
+          </a:stretch>
+        </p:blipFill>
+        <p:spPr>
+          <a:xfrm>
+            <a:off x="0" y="0"/>
+            <a:ext cx="4572000" cy="3048000"/>
+          </a:xfrm>
+          <a:prstGeom prst="rect">
+            <a:avLst/>
+          </a:prstGeom>
+        </p:spPr>
+      </p:pic>
+      <p:sp>
+        <p:nvSpPr>
+          <p:cNvPr id="3" name="Rectangle: Rounded Corners 2">
+            <a:extLst>
+              <a:ext uri="{FF2B5EF4-FFF2-40B4-BE49-F238E27FC236}">
+                <a16:creationId xmlns:a16="http://schemas.microsoft.com/office/drawing/2014/main" id="{D89A8EFC-0E6C-A68A-C604-9EA25995E589}"/>
+              </a:ext>
+            </a:extLst>
+          </p:cNvPr>
+          <p:cNvSpPr/>
+          <p:nvPr/>
+        </p:nvSpPr>
+        <p:spPr>
+          <a:xfrm>
+            <a:off x="542925" y="2190750"/>
+            <a:ext cx="571500" cy="571500"/>
+          </a:xfrm>
+          <a:prstGeom prst="roundRect">
+            <a:avLst/>
+          </a:prstGeom>
+          <a:solidFill>
+            <a:srgbClr val="2C2C2C"/>
+          </a:solidFill>
+          <a:ln>
+            <a:noFill/>
+          </a:ln>
+        </p:spPr>
+        <p:style>
+          <a:lnRef idx="2">
+            <a:schemeClr val="accent1">
+              <a:shade val="15000"/>
+            </a:schemeClr>
+          </a:lnRef>
+          <a:fillRef idx="1">
+            <a:schemeClr val="accent1"/>
+          </a:fillRef>
+          <a:effectRef idx="0">
+            <a:schemeClr val="accent1"/>
+          </a:effectRef>
+          <a:fontRef idx="minor">
+            <a:schemeClr val="lt1"/>
+          </a:fontRef>
+        </p:style>
+        <p:txBody>
+          <a:bodyPr rtlCol="0" anchor="ctr"/>
+          <a:lstStyle/>
+          <a:p>
+            <a:pPr algn="ctr"/>
+            <a:endParaRPr lang="en-SE"/>
+          </a:p>
+        </p:txBody>
+      </p:sp>
+      <p:sp>
+        <p:nvSpPr>
+          <p:cNvPr id="4" name="Rectangle: Rounded Corners 3">
+            <a:extLst>
+              <a:ext uri="{FF2B5EF4-FFF2-40B4-BE49-F238E27FC236}">
+                <a16:creationId xmlns:a16="http://schemas.microsoft.com/office/drawing/2014/main" id="{C4766633-598C-7695-7296-1423966C23DC}"/>
+              </a:ext>
+            </a:extLst>
+          </p:cNvPr>
+          <p:cNvSpPr/>
+          <p:nvPr/>
+        </p:nvSpPr>
+        <p:spPr>
+          <a:xfrm>
+            <a:off x="1685925" y="2190750"/>
+            <a:ext cx="571500" cy="571500"/>
+          </a:xfrm>
+          <a:prstGeom prst="roundRect">
+            <a:avLst/>
+          </a:prstGeom>
+          <a:solidFill>
+            <a:srgbClr val="2C2C2C"/>
+          </a:solidFill>
+          <a:ln>
+            <a:noFill/>
+          </a:ln>
+        </p:spPr>
+        <p:style>
+          <a:lnRef idx="2">
+            <a:schemeClr val="accent1">
+              <a:shade val="15000"/>
+            </a:schemeClr>
+          </a:lnRef>
+          <a:fillRef idx="1">
+            <a:schemeClr val="accent1"/>
+          </a:fillRef>
+          <a:effectRef idx="0">
+            <a:schemeClr val="accent1"/>
+          </a:effectRef>
+          <a:fontRef idx="minor">
+            <a:schemeClr val="lt1"/>
+          </a:fontRef>
+        </p:style>
+        <p:txBody>
+          <a:bodyPr rtlCol="0" anchor="ctr"/>
+          <a:lstStyle/>
+          <a:p>
+            <a:pPr algn="ctr"/>
+            <a:endParaRPr lang="en-SE"/>
+          </a:p>
+        </p:txBody>
+      </p:sp>
+      <p:sp>
+        <p:nvSpPr>
+          <p:cNvPr id="5" name="Rectangle: Rounded Corners 4">
+            <a:extLst>
+              <a:ext uri="{FF2B5EF4-FFF2-40B4-BE49-F238E27FC236}">
+                <a16:creationId xmlns:a16="http://schemas.microsoft.com/office/drawing/2014/main" id="{C3A244D4-DC76-6215-73B0-A6FD9D790FAF}"/>
+              </a:ext>
+            </a:extLst>
+          </p:cNvPr>
+          <p:cNvSpPr/>
+          <p:nvPr/>
+        </p:nvSpPr>
+        <p:spPr>
+          <a:xfrm>
+            <a:off x="2828925" y="2190750"/>
+            <a:ext cx="571500" cy="571500"/>
+          </a:xfrm>
+          <a:prstGeom prst="roundRect">
+            <a:avLst/>
+          </a:prstGeom>
+          <a:solidFill>
+            <a:srgbClr val="2C2C2C"/>
+          </a:solidFill>
+          <a:ln>
+            <a:noFill/>
+          </a:ln>
+        </p:spPr>
+        <p:style>
+          <a:lnRef idx="2">
+            <a:schemeClr val="accent1">
+              <a:shade val="15000"/>
+            </a:schemeClr>
+          </a:lnRef>
+          <a:fillRef idx="1">
+            <a:schemeClr val="accent1"/>
+          </a:fillRef>
+          <a:effectRef idx="0">
+            <a:schemeClr val="accent1"/>
+          </a:effectRef>
+          <a:fontRef idx="minor">
+            <a:schemeClr val="lt1"/>
+          </a:fontRef>
+        </p:style>
+        <p:txBody>
+          <a:bodyPr rtlCol="0" anchor="ctr"/>
+          <a:lstStyle/>
+          <a:p>
+            <a:pPr algn="ctr"/>
+            <a:endParaRPr lang="en-SE"/>
+          </a:p>
+        </p:txBody>
+      </p:sp>
+      <p:sp>
+        <p:nvSpPr>
+          <p:cNvPr id="6" name="Rectangle: Rounded Corners 5">
+            <a:extLst>
+              <a:ext uri="{FF2B5EF4-FFF2-40B4-BE49-F238E27FC236}">
+                <a16:creationId xmlns:a16="http://schemas.microsoft.com/office/drawing/2014/main" id="{BEE143A2-875D-F7B0-045A-C20AEC5BFD00}"/>
+              </a:ext>
+            </a:extLst>
+          </p:cNvPr>
+          <p:cNvSpPr/>
+          <p:nvPr/>
+        </p:nvSpPr>
+        <p:spPr>
+          <a:xfrm>
+            <a:off x="142875" y="762000"/>
+            <a:ext cx="4000500" cy="342900"/>
+          </a:xfrm>
+          <a:prstGeom prst="roundRect">
+            <a:avLst>
+              <a:gd name="adj" fmla="val 50000"/>
+            </a:avLst>
+          </a:prstGeom>
+          <a:solidFill>
+            <a:schemeClr val="accent1">
+              <a:alpha val="80000"/>
+            </a:schemeClr>
+          </a:solidFill>
+          <a:ln>
+            <a:noFill/>
+          </a:ln>
+          <a:effectLst>
+            <a:softEdge rad="0"/>
+          </a:effectLst>
+        </p:spPr>
+        <p:style>
+          <a:lnRef idx="2">
+            <a:schemeClr val="accent1">
+              <a:shade val="15000"/>
+            </a:schemeClr>
+          </a:lnRef>
+          <a:fillRef idx="1">
+            <a:schemeClr val="accent1"/>
+          </a:fillRef>
+          <a:effectRef idx="0">
+            <a:schemeClr val="accent1"/>
+          </a:effectRef>
+          <a:fontRef idx="minor">
+            <a:schemeClr val="lt1"/>
+          </a:fontRef>
+        </p:style>
+        <p:txBody>
+          <a:bodyPr rtlCol="0" anchor="ctr"/>
+          <a:lstStyle/>
+          <a:p>
+            <a:pPr algn="ctr"/>
+            <a:endParaRPr lang="en-SE"/>
+          </a:p>
+        </p:txBody>
+      </p:sp>
+      <p:sp>
+        <p:nvSpPr>
+          <p:cNvPr id="7" name="Rectangle: Rounded Corners 6">
+            <a:extLst>
+              <a:ext uri="{FF2B5EF4-FFF2-40B4-BE49-F238E27FC236}">
+                <a16:creationId xmlns:a16="http://schemas.microsoft.com/office/drawing/2014/main" id="{77E8A8F5-A389-0582-3ED0-DEDEABFCDA1A}"/>
+              </a:ext>
+            </a:extLst>
+          </p:cNvPr>
+          <p:cNvSpPr/>
+          <p:nvPr/>
+        </p:nvSpPr>
+        <p:spPr>
+          <a:xfrm>
+            <a:off x="142875" y="1400175"/>
+            <a:ext cx="4000500" cy="342900"/>
+          </a:xfrm>
+          <a:prstGeom prst="roundRect">
+            <a:avLst>
+              <a:gd name="adj" fmla="val 50000"/>
+            </a:avLst>
+          </a:prstGeom>
+          <a:solidFill>
+            <a:srgbClr val="666666">
+              <a:alpha val="80000"/>
+            </a:srgbClr>
+          </a:solidFill>
+          <a:ln>
+            <a:noFill/>
+          </a:ln>
+          <a:effectLst>
+            <a:softEdge rad="0"/>
+          </a:effectLst>
+        </p:spPr>
+        <p:style>
+          <a:lnRef idx="2">
+            <a:schemeClr val="accent1">
+              <a:shade val="15000"/>
+            </a:schemeClr>
+          </a:lnRef>
+          <a:fillRef idx="1">
+            <a:schemeClr val="accent1"/>
+          </a:fillRef>
+          <a:effectRef idx="0">
+            <a:schemeClr val="accent1"/>
+          </a:effectRef>
+          <a:fontRef idx="minor">
+            <a:schemeClr val="lt1"/>
+          </a:fontRef>
+        </p:style>
+        <p:txBody>
+          <a:bodyPr rtlCol="0" anchor="ctr"/>
+          <a:lstStyle/>
+          <a:p>
+            <a:pPr algn="ctr"/>
+            <a:endParaRPr lang="en-SE"/>
+          </a:p>
+        </p:txBody>
+      </p:sp>
+    </p:spTree>
+    <p:extLst>
+      <p:ext uri="{BB962C8B-B14F-4D97-AF65-F5344CB8AC3E}">
+        <p14:creationId xmlns:p14="http://schemas.microsoft.com/office/powerpoint/2010/main" val="4045999592"/>
+      </p:ext>
+    </p:extLst>
+  </p:cSld>
+  <p:clrMapOvr>
+    <a:masterClrMapping/>
+  </p:clrMapOvr>
+</p:sld>
+</file>
+
 <file path=ppt/theme/theme1.xml><?xml version="1.0" encoding="utf-8"?>
 <a:theme xmlns:a="http://schemas.openxmlformats.org/drawingml/2006/main" name="Office Theme">
   <a:themeElements>
